--- a/结题答辩PPT_最终版.pptx
+++ b/结题答辩PPT_最终版.pptx
@@ -3252,7 +3252,7 @@
         <p:spPr>
           <a:xfrm>
             <a:off x="457200" y="1371600"/>
-            <a:ext cx="11247120" cy="1709648"/>
+            <a:ext cx="11247120" cy="1995862"/>
           </a:xfrm>
           <a:prstGeom prst="rect">
             <a:avLst/>
@@ -3347,7 +3347,7 @@
                 <a:latin typeface="Microsoft YaHei"/>
                 <a:ea typeface="Microsoft YaHei"/>
               </a:rPr>
-              <a:t>参数高效微调释放基础模型潜力：冻结编码器、只训 4.34% 参数，IoU 提升 0.48</a:t>
+              <a:t>LoRA 参数高效微调：只训 4.8% 参数，零样本 IoU 提升 0.605，超过全监督 U-Net</a:t>
             </a:r>
           </a:p>
           <a:p>
@@ -3381,7 +3381,7 @@
                 <a:latin typeface="Microsoft YaHei"/>
                 <a:ea typeface="Microsoft YaHei"/>
               </a:rPr>
-              <a:t>增强物理预处理：零训练将传统 Otsu 的 IoU 提升约 0.09</a:t>
+              <a:t>「零样本 → 冻结微调 → LoRA 微调」的完整技术演进路径</a:t>
             </a:r>
           </a:p>
           <a:p>
@@ -3398,7 +3398,7 @@
                 <a:latin typeface="Microsoft YaHei"/>
                 <a:ea typeface="Microsoft YaHei"/>
               </a:rPr>
-              <a:t>标准数据集 + 六项指标 + 消融 + 零样本/微调对比的完整可复现评估体系</a:t>
+              <a:t>标准数据集 + 六项指标 + 消融 + 零样本/冻结/LoRA/U-Net 对比的完整可复现评估体系</a:t>
             </a:r>
           </a:p>
         </p:txBody>
@@ -4081,7 +4081,7 @@
                 <a:latin typeface="Microsoft YaHei"/>
                 <a:ea typeface="Microsoft YaHei"/>
               </a:rPr>
-              <a:t>方法 ②：参数高效微调 SAM（核心）</a:t>
+              <a:t>方法 ②：LoRA 参数高效微调 SAM（核心）</a:t>
             </a:r>
           </a:p>
         </p:txBody>
@@ -4121,7 +4121,7 @@
                 <a:latin typeface="Microsoft YaHei"/>
                 <a:ea typeface="Microsoft YaHei"/>
               </a:rPr>
-              <a:t>冻结图像编码器（ViT-B，占绝大部分参数）</a:t>
+              <a:t>在 SAM 图像编码器注意力层挂 LoRA（低秩适配，rank=8）</a:t>
             </a:r>
           </a:p>
           <a:p>
@@ -4138,7 +4138,7 @@
                 <a:latin typeface="Microsoft YaHei"/>
                 <a:ea typeface="Microsoft YaHei"/>
               </a:rPr>
-              <a:t>仅训练掩膜解码器 + 提示编码器：4.06M 参数，仅占总参数 93.7M 的 4.34%</a:t>
+              <a:t>冻结原权重，只训练 LoRA（0.44M）+ 解码器 + 提示编码器，共 4.51M（约 4.8%）</a:t>
             </a:r>
           </a:p>
           <a:p>
@@ -4155,7 +4155,7 @@
                 <a:latin typeface="Microsoft YaHei"/>
                 <a:ea typeface="Microsoft YaHei"/>
               </a:rPr>
-              <a:t>Focal Loss + Dice 损失，点/框双提示训练，水平翻转增强，余弦学习率</a:t>
+              <a:t>Focal Loss + Dice 损失，点/框双提示，水平翻转增强，混合精度加速</a:t>
             </a:r>
           </a:p>
           <a:p>
@@ -4172,24 +4172,7 @@
                 <a:latin typeface="Microsoft YaHei"/>
                 <a:ea typeface="Microsoft YaHei"/>
               </a:rPr>
-              <a:t>AISD 训练集 412 张、150 个 epoch，RTX 4060（8GB），约 6 小时</a:t>
-            </a:r>
-          </a:p>
-          <a:p>
-            <a:pPr>
-              <a:spcAft>
-                <a:spcPts val="800"/>
-              </a:spcAft>
-            </a:pPr>
-            <a:r>
-              <a:rPr sz="2000" b="0">
-                <a:solidFill>
-                  <a:srgbClr val="1F3B63"/>
-                </a:solidFill>
-                <a:latin typeface="Microsoft YaHei"/>
-                <a:ea typeface="Microsoft YaHei"/>
-              </a:rPr>
-              <a:t>结果：把零样本 SAM 的 IoU 从 0.23 提升到 0.72</a:t>
+              <a:t>结果：零样本 SAM 的 IoU 从 0.234 提升到 0.839，超过全监督 U-Net（0.805）</a:t>
             </a:r>
           </a:p>
         </p:txBody>
@@ -4559,7 +4542,7 @@
                 <a:gridCol w="2491740"/>
                 <a:gridCol w="2491740"/>
               </a:tblGrid>
-              <a:tr h="548640">
+              <a:tr h="480060">
                 <a:tc>
                   <a:txBody>
                     <a:bodyPr/>
@@ -4641,7 +4624,7 @@
                   <a:tcPr/>
                 </a:tc>
               </a:tr>
-              <a:tr h="548640">
+              <a:tr h="480060">
                 <a:tc>
                   <a:txBody>
                     <a:bodyPr/>
@@ -4723,7 +4706,7 @@
                   <a:tcPr/>
                 </a:tc>
               </a:tr>
-              <a:tr h="548640">
+              <a:tr h="480060">
                 <a:tc>
                   <a:txBody>
                     <a:bodyPr/>
@@ -4805,7 +4788,7 @@
                   <a:tcPr/>
                 </a:tc>
               </a:tr>
-              <a:tr h="548640">
+              <a:tr h="480060">
                 <a:tc>
                   <a:txBody>
                     <a:bodyPr/>
@@ -4887,89 +4870,7 @@
                   <a:tcPr/>
                 </a:tc>
               </a:tr>
-              <a:tr h="548640">
-                <a:tc>
-                  <a:txBody>
-                    <a:bodyPr/>
-                    <a:lstStyle/>
-                    <a:p>
-                      <a:pPr algn="ctr"/>
-                      <a:r>
-                        <a:rPr sz="1500" b="0">
-                          <a:solidFill>
-                            <a:srgbClr val="1F3B63"/>
-                          </a:solidFill>
-                          <a:latin typeface="Microsoft YaHei"/>
-                          <a:ea typeface="Microsoft YaHei"/>
-                        </a:rPr>
-                        <a:t>零样本SAM+自动提示</a:t>
-                      </a:r>
-                    </a:p>
-                  </a:txBody>
-                  <a:tcPr/>
-                </a:tc>
-                <a:tc>
-                  <a:txBody>
-                    <a:bodyPr/>
-                    <a:lstStyle/>
-                    <a:p>
-                      <a:pPr algn="ctr"/>
-                      <a:r>
-                        <a:rPr sz="1500" b="0">
-                          <a:solidFill>
-                            <a:srgbClr val="1F3B63"/>
-                          </a:solidFill>
-                          <a:latin typeface="Microsoft YaHei"/>
-                          <a:ea typeface="Microsoft YaHei"/>
-                        </a:rPr>
-                        <a:t>0.234</a:t>
-                      </a:r>
-                    </a:p>
-                  </a:txBody>
-                  <a:tcPr/>
-                </a:tc>
-                <a:tc>
-                  <a:txBody>
-                    <a:bodyPr/>
-                    <a:lstStyle/>
-                    <a:p>
-                      <a:pPr algn="ctr"/>
-                      <a:r>
-                        <a:rPr sz="1500" b="0">
-                          <a:solidFill>
-                            <a:srgbClr val="1F3B63"/>
-                          </a:solidFill>
-                          <a:latin typeface="Microsoft YaHei"/>
-                          <a:ea typeface="Microsoft YaHei"/>
-                        </a:rPr>
-                        <a:t>0.430</a:t>
-                      </a:r>
-                    </a:p>
-                  </a:txBody>
-                  <a:tcPr/>
-                </a:tc>
-                <a:tc>
-                  <a:txBody>
-                    <a:bodyPr/>
-                    <a:lstStyle/>
-                    <a:p>
-                      <a:pPr algn="ctr"/>
-                      <a:r>
-                        <a:rPr sz="1500" b="0">
-                          <a:solidFill>
-                            <a:srgbClr val="1F3B63"/>
-                          </a:solidFill>
-                          <a:latin typeface="Microsoft YaHei"/>
-                          <a:ea typeface="Microsoft YaHei"/>
-                        </a:rPr>
-                        <a:t>0.370</a:t>
-                      </a:r>
-                    </a:p>
-                  </a:txBody>
-                  <a:tcPr/>
-                </a:tc>
-              </a:tr>
-              <a:tr h="548640">
+              <a:tr h="480060">
                 <a:tc>
                   <a:txBody>
                     <a:bodyPr/>
@@ -5051,7 +4952,171 @@
                   <a:tcPr/>
                 </a:tc>
               </a:tr>
-              <a:tr h="548640">
+              <a:tr h="480060">
+                <a:tc>
+                  <a:txBody>
+                    <a:bodyPr/>
+                    <a:lstStyle/>
+                    <a:p>
+                      <a:pPr algn="ctr"/>
+                      <a:r>
+                        <a:rPr sz="1500" b="0">
+                          <a:solidFill>
+                            <a:srgbClr val="1F3B63"/>
+                          </a:solidFill>
+                          <a:latin typeface="Microsoft YaHei"/>
+                          <a:ea typeface="Microsoft YaHei"/>
+                        </a:rPr>
+                        <a:t>冻结编码器微调 SAM</a:t>
+                      </a:r>
+                    </a:p>
+                  </a:txBody>
+                  <a:tcPr/>
+                </a:tc>
+                <a:tc>
+                  <a:txBody>
+                    <a:bodyPr/>
+                    <a:lstStyle/>
+                    <a:p>
+                      <a:pPr algn="ctr"/>
+                      <a:r>
+                        <a:rPr sz="1500" b="0">
+                          <a:solidFill>
+                            <a:srgbClr val="1F3B63"/>
+                          </a:solidFill>
+                          <a:latin typeface="Microsoft YaHei"/>
+                          <a:ea typeface="Microsoft YaHei"/>
+                        </a:rPr>
+                        <a:t>0.717</a:t>
+                      </a:r>
+                    </a:p>
+                  </a:txBody>
+                  <a:tcPr/>
+                </a:tc>
+                <a:tc>
+                  <a:txBody>
+                    <a:bodyPr/>
+                    <a:lstStyle/>
+                    <a:p>
+                      <a:pPr algn="ctr"/>
+                      <a:r>
+                        <a:rPr sz="1500" b="0">
+                          <a:solidFill>
+                            <a:srgbClr val="1F3B63"/>
+                          </a:solidFill>
+                          <a:latin typeface="Microsoft YaHei"/>
+                          <a:ea typeface="Microsoft YaHei"/>
+                        </a:rPr>
+                        <a:t>0.109</a:t>
+                      </a:r>
+                    </a:p>
+                  </a:txBody>
+                  <a:tcPr/>
+                </a:tc>
+                <a:tc>
+                  <a:txBody>
+                    <a:bodyPr/>
+                    <a:lstStyle/>
+                    <a:p>
+                      <a:pPr algn="ctr"/>
+                      <a:r>
+                        <a:rPr sz="1500" b="0">
+                          <a:solidFill>
+                            <a:srgbClr val="1F3B63"/>
+                          </a:solidFill>
+                          <a:latin typeface="Microsoft YaHei"/>
+                          <a:ea typeface="Microsoft YaHei"/>
+                        </a:rPr>
+                        <a:t>0.833</a:t>
+                      </a:r>
+                    </a:p>
+                  </a:txBody>
+                  <a:tcPr/>
+                </a:tc>
+              </a:tr>
+              <a:tr h="480060">
+                <a:tc>
+                  <a:txBody>
+                    <a:bodyPr/>
+                    <a:lstStyle/>
+                    <a:p>
+                      <a:pPr algn="ctr"/>
+                      <a:r>
+                        <a:rPr sz="1500" b="0">
+                          <a:solidFill>
+                            <a:srgbClr val="1F3B63"/>
+                          </a:solidFill>
+                          <a:latin typeface="Microsoft YaHei"/>
+                          <a:ea typeface="Microsoft YaHei"/>
+                        </a:rPr>
+                        <a:t>全监督 U-Net</a:t>
+                      </a:r>
+                    </a:p>
+                  </a:txBody>
+                  <a:tcPr/>
+                </a:tc>
+                <a:tc>
+                  <a:txBody>
+                    <a:bodyPr/>
+                    <a:lstStyle/>
+                    <a:p>
+                      <a:pPr algn="ctr"/>
+                      <a:r>
+                        <a:rPr sz="1500" b="0">
+                          <a:solidFill>
+                            <a:srgbClr val="1F3B63"/>
+                          </a:solidFill>
+                          <a:latin typeface="Microsoft YaHei"/>
+                          <a:ea typeface="Microsoft YaHei"/>
+                        </a:rPr>
+                        <a:t>0.805</a:t>
+                      </a:r>
+                    </a:p>
+                  </a:txBody>
+                  <a:tcPr/>
+                </a:tc>
+                <a:tc>
+                  <a:txBody>
+                    <a:bodyPr/>
+                    <a:lstStyle/>
+                    <a:p>
+                      <a:pPr algn="ctr"/>
+                      <a:r>
+                        <a:rPr sz="1500" b="0">
+                          <a:solidFill>
+                            <a:srgbClr val="1F3B63"/>
+                          </a:solidFill>
+                          <a:latin typeface="Microsoft YaHei"/>
+                          <a:ea typeface="Microsoft YaHei"/>
+                        </a:rPr>
+                        <a:t>—</a:t>
+                      </a:r>
+                    </a:p>
+                  </a:txBody>
+                  <a:tcPr/>
+                </a:tc>
+                <a:tc>
+                  <a:txBody>
+                    <a:bodyPr/>
+                    <a:lstStyle/>
+                    <a:p>
+                      <a:pPr algn="ctr"/>
+                      <a:r>
+                        <a:rPr sz="1500" b="0">
+                          <a:solidFill>
+                            <a:srgbClr val="1F3B63"/>
+                          </a:solidFill>
+                          <a:latin typeface="Microsoft YaHei"/>
+                          <a:ea typeface="Microsoft YaHei"/>
+                        </a:rPr>
+                        <a:t>—</a:t>
+                      </a:r>
+                    </a:p>
+                  </a:txBody>
+                  <a:tcPr/>
+                </a:tc>
+              </a:tr>
+              <a:tr h="480060">
                 <a:tc>
                   <a:txBody>
                     <a:bodyPr/>
@@ -5066,7 +5131,7 @@
                           <a:latin typeface="Microsoft YaHei"/>
                           <a:ea typeface="Microsoft YaHei"/>
                         </a:rPr>
-                        <a:t>微调SAM+框提示（本项目）</a:t>
+                        <a:t>LoRA 微调 SAM（本项目）</a:t>
                       </a:r>
                     </a:p>
                   </a:txBody>
@@ -5090,7 +5155,7 @@
                           <a:latin typeface="Microsoft YaHei"/>
                           <a:ea typeface="Microsoft YaHei"/>
                         </a:rPr>
-                        <a:t>0.717</a:t>
+                        <a:t>0.839</a:t>
                       </a:r>
                     </a:p>
                   </a:txBody>
@@ -5114,7 +5179,7 @@
                           <a:latin typeface="Microsoft YaHei"/>
                           <a:ea typeface="Microsoft YaHei"/>
                         </a:rPr>
-                        <a:t>0.109</a:t>
+                        <a:t>0.050</a:t>
                       </a:r>
                     </a:p>
                   </a:txBody>
@@ -5138,7 +5203,7 @@
                           <a:latin typeface="Microsoft YaHei"/>
                           <a:ea typeface="Microsoft YaHei"/>
                         </a:rPr>
-                        <a:t>0.833</a:t>
+                        <a:t>0.912</a:t>
                       </a:r>
                     </a:p>
                   </a:txBody>

--- a/结题答辩PPT_最终版.pptx
+++ b/结题答辩PPT_最终版.pptx
@@ -4542,7 +4542,7 @@
                 <a:gridCol w="2491740"/>
                 <a:gridCol w="2491740"/>
               </a:tblGrid>
-              <a:tr h="480060">
+              <a:tr h="426720">
                 <a:tc>
                   <a:txBody>
                     <a:bodyPr/>
@@ -4624,7 +4624,7 @@
                   <a:tcPr/>
                 </a:tc>
               </a:tr>
-              <a:tr h="480060">
+              <a:tr h="426720">
                 <a:tc>
                   <a:txBody>
                     <a:bodyPr/>
@@ -4706,7 +4706,7 @@
                   <a:tcPr/>
                 </a:tc>
               </a:tr>
-              <a:tr h="480060">
+              <a:tr h="426720">
                 <a:tc>
                   <a:txBody>
                     <a:bodyPr/>
@@ -4788,7 +4788,7 @@
                   <a:tcPr/>
                 </a:tc>
               </a:tr>
-              <a:tr h="480060">
+              <a:tr h="426720">
                 <a:tc>
                   <a:txBody>
                     <a:bodyPr/>
@@ -4870,7 +4870,7 @@
                   <a:tcPr/>
                 </a:tc>
               </a:tr>
-              <a:tr h="480060">
+              <a:tr h="426720">
                 <a:tc>
                   <a:txBody>
                     <a:bodyPr/>
@@ -4952,7 +4952,7 @@
                   <a:tcPr/>
                 </a:tc>
               </a:tr>
-              <a:tr h="480060">
+              <a:tr h="426720">
                 <a:tc>
                   <a:txBody>
                     <a:bodyPr/>
@@ -5034,7 +5034,89 @@
                   <a:tcPr/>
                 </a:tc>
               </a:tr>
-              <a:tr h="480060">
+              <a:tr h="426720">
+                <a:tc>
+                  <a:txBody>
+                    <a:bodyPr/>
+                    <a:lstStyle/>
+                    <a:p>
+                      <a:pPr algn="ctr"/>
+                      <a:r>
+                        <a:rPr sz="1500" b="0">
+                          <a:solidFill>
+                            <a:srgbClr val="1F3B63"/>
+                          </a:solidFill>
+                          <a:latin typeface="Microsoft YaHei"/>
+                          <a:ea typeface="Microsoft YaHei"/>
+                        </a:rPr>
+                        <a:t>全监督 SegNet</a:t>
+                      </a:r>
+                    </a:p>
+                  </a:txBody>
+                  <a:tcPr/>
+                </a:tc>
+                <a:tc>
+                  <a:txBody>
+                    <a:bodyPr/>
+                    <a:lstStyle/>
+                    <a:p>
+                      <a:pPr algn="ctr"/>
+                      <a:r>
+                        <a:rPr sz="1500" b="0">
+                          <a:solidFill>
+                            <a:srgbClr val="1F3B63"/>
+                          </a:solidFill>
+                          <a:latin typeface="Microsoft YaHei"/>
+                          <a:ea typeface="Microsoft YaHei"/>
+                        </a:rPr>
+                        <a:t>0.780</a:t>
+                      </a:r>
+                    </a:p>
+                  </a:txBody>
+                  <a:tcPr/>
+                </a:tc>
+                <a:tc>
+                  <a:txBody>
+                    <a:bodyPr/>
+                    <a:lstStyle/>
+                    <a:p>
+                      <a:pPr algn="ctr"/>
+                      <a:r>
+                        <a:rPr sz="1500" b="0">
+                          <a:solidFill>
+                            <a:srgbClr val="1F3B63"/>
+                          </a:solidFill>
+                          <a:latin typeface="Microsoft YaHei"/>
+                          <a:ea typeface="Microsoft YaHei"/>
+                        </a:rPr>
+                        <a:t>0.086</a:t>
+                      </a:r>
+                    </a:p>
+                  </a:txBody>
+                  <a:tcPr/>
+                </a:tc>
+                <a:tc>
+                  <a:txBody>
+                    <a:bodyPr/>
+                    <a:lstStyle/>
+                    <a:p>
+                      <a:pPr algn="ctr"/>
+                      <a:r>
+                        <a:rPr sz="1500" b="0">
+                          <a:solidFill>
+                            <a:srgbClr val="1F3B63"/>
+                          </a:solidFill>
+                          <a:latin typeface="Microsoft YaHei"/>
+                          <a:ea typeface="Microsoft YaHei"/>
+                        </a:rPr>
+                        <a:t>0.875</a:t>
+                      </a:r>
+                    </a:p>
+                  </a:txBody>
+                  <a:tcPr/>
+                </a:tc>
+              </a:tr>
+              <a:tr h="426720">
                 <a:tc>
                   <a:txBody>
                     <a:bodyPr/>
@@ -5089,7 +5171,7 @@
                           <a:latin typeface="Microsoft YaHei"/>
                           <a:ea typeface="Microsoft YaHei"/>
                         </a:rPr>
-                        <a:t>—</a:t>
+                        <a:t>0.066</a:t>
                       </a:r>
                     </a:p>
                   </a:txBody>
@@ -5109,14 +5191,14 @@
                           <a:latin typeface="Microsoft YaHei"/>
                           <a:ea typeface="Microsoft YaHei"/>
                         </a:rPr>
-                        <a:t>—</a:t>
+                        <a:t>0.891</a:t>
                       </a:r>
                     </a:p>
                   </a:txBody>
                   <a:tcPr/>
                 </a:tc>
               </a:tr>
-              <a:tr h="480060">
+              <a:tr h="426720">
                 <a:tc>
                   <a:txBody>
                     <a:bodyPr/>

--- a/结题答辩PPT_最终版.pptx
+++ b/结题答辩PPT_最终版.pptx
@@ -3347,7 +3347,7 @@
                 <a:latin typeface="Microsoft YaHei"/>
                 <a:ea typeface="Microsoft YaHei"/>
               </a:rPr>
-              <a:t>LoRA 参数高效微调：只训 4.8% 参数，零样本 IoU 提升 0.605，超过全监督 U-Net</a:t>
+              <a:t>LoRA 参数高效微调：只训 4.8% 参数，无泄漏划分上数值上高于全监督 U-Net/SegNet</a:t>
             </a:r>
           </a:p>
           <a:p>
@@ -3398,7 +3398,7 @@
                 <a:latin typeface="Microsoft YaHei"/>
                 <a:ea typeface="Microsoft YaHei"/>
               </a:rPr>
-              <a:t>标准数据集 + 六项指标 + 消融 + 零样本/冻结/LoRA/U-Net 对比的完整可复现评估体系</a:t>
+              <a:t>主动排查并修复官方划分同源泄漏 + 基线增强 bug，重建诚实评估基座</a:t>
             </a:r>
           </a:p>
         </p:txBody>
@@ -3850,7 +3850,7 @@
                 <a:latin typeface="Microsoft YaHei"/>
                 <a:ea typeface="Microsoft YaHei"/>
               </a:rPr>
-              <a:t>② 自动提示生成：候选区域质心作前景点 + 区域外背景点</a:t>
+              <a:t>② 自动提示生成：候选区域包围框作框提示（不读 GT）</a:t>
             </a:r>
           </a:p>
           <a:p>
@@ -3867,7 +3867,7 @@
                 <a:latin typeface="Microsoft YaHei"/>
                 <a:ea typeface="Microsoft YaHei"/>
               </a:rPr>
-              <a:t>③ 参数高效微调 SAM：冻结编码器、仅训练 4.34% 参数，适配遥感阴影</a:t>
+              <a:t>③ 参数高效微调 SAM：冻结编码器、仅训练约 4.8% 参数，适配遥感阴影</a:t>
             </a:r>
           </a:p>
           <a:p>
@@ -4172,7 +4172,7 @@
                 <a:latin typeface="Microsoft YaHei"/>
                 <a:ea typeface="Microsoft YaHei"/>
               </a:rPr>
-              <a:t>结果：零样本 SAM 的 IoU 从 0.234 提升到 0.839，超过全监督 U-Net（0.805）</a:t>
+              <a:t>结果：无泄漏划分上 IoU 0.788 / BER 0.064，数值上高于全监督 U-Net(0.741)/SegNet(0.740)</a:t>
             </a:r>
           </a:p>
         </p:txBody>
@@ -4392,7 +4392,7 @@
                 <a:latin typeface="Microsoft YaHei"/>
                 <a:ea typeface="Microsoft YaHei"/>
               </a:rPr>
-              <a:t>数据集：AISD（训练 412 张 / 验证 51 张 / 测试 51 张，512×512）</a:t>
+              <a:t>数据集：AISD；⚠️ 官方 Test51 与训练集同源泄漏（43 基名中 42 个重叠）</a:t>
             </a:r>
           </a:p>
           <a:p>
@@ -4409,7 +4409,7 @@
                 <a:latin typeface="Microsoft YaHei"/>
                 <a:ea typeface="Microsoft YaHei"/>
               </a:rPr>
-              <a:t>模型：SAM ViT-B（358MB），NVIDIA RTX 4060（8GB）</a:t>
+              <a:t>主口径：按原始大图重划 68/16/21 原图（262/58/92 张），三集互不重叠（无泄漏）</a:t>
             </a:r>
           </a:p>
           <a:p>
@@ -4426,7 +4426,7 @@
                 <a:latin typeface="Microsoft YaHei"/>
                 <a:ea typeface="Microsoft YaHei"/>
               </a:rPr>
-              <a:t>微调：冻结编码器，训练 4.34% 参数，150 epoch，约 6 小时</a:t>
+              <a:t>模型：SAM ViT-B（358MB），NVIDIA RTX 4060（8GB）</a:t>
             </a:r>
           </a:p>
           <a:p>
@@ -4443,7 +4443,7 @@
                 <a:latin typeface="Microsoft YaHei"/>
                 <a:ea typeface="Microsoft YaHei"/>
               </a:rPr>
-              <a:t>测试方式：全自动（增强 Otsu 自动点提示）</a:t>
+              <a:t>选模型：仅在验证集按 IoU 选 best-val，测试集只用于最终报告</a:t>
             </a:r>
           </a:p>
           <a:p>
@@ -4460,7 +4460,7 @@
                 <a:latin typeface="Microsoft YaHei"/>
                 <a:ea typeface="Microsoft YaHei"/>
               </a:rPr>
-              <a:t>指标：IoU / BER / F1 / OA / Precision / Recall</a:t>
+              <a:t>指标：IoU / BER / F1 / OA / Precision / Recall（逐图计算再平均）</a:t>
             </a:r>
           </a:p>
         </p:txBody>
@@ -4513,7 +4513,19 @@
                 <a:latin typeface="Microsoft YaHei"/>
                 <a:ea typeface="Microsoft YaHei"/>
               </a:rPr>
-              <a:t>定量对比结果（AISD Test51 平均）</a:t>
+              <a:t>定量对比结果（无泄漏划分，92 张 / 21 独立场景，best-val）</a:t>
+            </a:r>
+          </a:p>
+          <a:p>
+            <a:r>
+              <a:rPr sz="1400" b="0">
+                <a:solidFill>
+                  <a:srgbClr val="555555"/>
+                </a:solidFill>
+                <a:latin typeface="Microsoft YaHei"/>
+                <a:ea typeface="Microsoft YaHei"/>
+              </a:rPr>
+              <a:t>所有方法同一划分重训；单 seed、未做显著性检验</a:t>
             </a:r>
           </a:p>
         </p:txBody>
@@ -4527,8 +4539,8 @@
           <p:nvPr/>
         </p:nvGraphicFramePr>
         <p:xfrm>
-          <a:off x="1097280" y="1554480"/>
-          <a:ext cx="9966960" cy="3840480"/>
+          <a:off x="1463040" y="1737360"/>
+          <a:ext cx="9235440" cy="1828800"/>
         </p:xfrm>
         <a:graphic>
           <a:graphicData uri="http://schemas.openxmlformats.org/drawingml/2006/table">
@@ -4537,12 +4549,12 @@
                 <a:tableStyleId>{5C22544A-7EE6-4342-B048-85BDC9FD1C3A}</a:tableStyleId>
               </a:tblPr>
               <a:tblGrid>
-                <a:gridCol w="2491740"/>
-                <a:gridCol w="2491740"/>
-                <a:gridCol w="2491740"/>
-                <a:gridCol w="2491740"/>
+                <a:gridCol w="2308860"/>
+                <a:gridCol w="2308860"/>
+                <a:gridCol w="2308860"/>
+                <a:gridCol w="2308860"/>
               </a:tblGrid>
-              <a:tr h="426720">
+              <a:tr h="457200">
                 <a:tc>
                   <a:txBody>
                     <a:bodyPr/>
@@ -4550,7 +4562,7 @@
                     <a:p>
                       <a:pPr algn="ctr"/>
                       <a:r>
-                        <a:rPr sz="1500" b="1">
+                        <a:rPr sz="1600" b="1">
                           <a:solidFill>
                             <a:srgbClr val="1F3B63"/>
                           </a:solidFill>
@@ -4570,7 +4582,7 @@
                     <a:p>
                       <a:pPr algn="ctr"/>
                       <a:r>
-                        <a:rPr sz="1500" b="1">
+                        <a:rPr sz="1600" b="1">
                           <a:solidFill>
                             <a:srgbClr val="1F3B63"/>
                           </a:solidFill>
@@ -4590,7 +4602,7 @@
                     <a:p>
                       <a:pPr algn="ctr"/>
                       <a:r>
-                        <a:rPr sz="1500" b="1">
+                        <a:rPr sz="1600" b="1">
                           <a:solidFill>
                             <a:srgbClr val="1F3B63"/>
                           </a:solidFill>
@@ -4610,7 +4622,7 @@
                     <a:p>
                       <a:pPr algn="ctr"/>
                       <a:r>
-                        <a:rPr sz="1500" b="1">
+                        <a:rPr sz="1600" b="1">
                           <a:solidFill>
                             <a:srgbClr val="1F3B63"/>
                           </a:solidFill>
@@ -4624,7 +4636,7 @@
                   <a:tcPr/>
                 </a:tc>
               </a:tr>
-              <a:tr h="426720">
+              <a:tr h="457200">
                 <a:tc>
                   <a:txBody>
                     <a:bodyPr/>
@@ -4632,581 +4644,7 @@
                     <a:p>
                       <a:pPr algn="ctr"/>
                       <a:r>
-                        <a:rPr sz="1500" b="0">
-                          <a:solidFill>
-                            <a:srgbClr val="1F3B63"/>
-                          </a:solidFill>
-                          <a:latin typeface="Microsoft YaHei"/>
-                          <a:ea typeface="Microsoft YaHei"/>
-                        </a:rPr>
-                        <a:t>Otsu（传统阈值）</a:t>
-                      </a:r>
-                    </a:p>
-                  </a:txBody>
-                  <a:tcPr/>
-                </a:tc>
-                <a:tc>
-                  <a:txBody>
-                    <a:bodyPr/>
-                    <a:lstStyle/>
-                    <a:p>
-                      <a:pPr algn="ctr"/>
-                      <a:r>
-                        <a:rPr sz="1500" b="0">
-                          <a:solidFill>
-                            <a:srgbClr val="1F3B63"/>
-                          </a:solidFill>
-                          <a:latin typeface="Microsoft YaHei"/>
-                          <a:ea typeface="Microsoft YaHei"/>
-                        </a:rPr>
-                        <a:t>0.424</a:t>
-                      </a:r>
-                    </a:p>
-                  </a:txBody>
-                  <a:tcPr/>
-                </a:tc>
-                <a:tc>
-                  <a:txBody>
-                    <a:bodyPr/>
-                    <a:lstStyle/>
-                    <a:p>
-                      <a:pPr algn="ctr"/>
-                      <a:r>
-                        <a:rPr sz="1500" b="0">
-                          <a:solidFill>
-                            <a:srgbClr val="1F3B63"/>
-                          </a:solidFill>
-                          <a:latin typeface="Microsoft YaHei"/>
-                          <a:ea typeface="Microsoft YaHei"/>
-                        </a:rPr>
-                        <a:t>0.204</a:t>
-                      </a:r>
-                    </a:p>
-                  </a:txBody>
-                  <a:tcPr/>
-                </a:tc>
-                <a:tc>
-                  <a:txBody>
-                    <a:bodyPr/>
-                    <a:lstStyle/>
-                    <a:p>
-                      <a:pPr algn="ctr"/>
-                      <a:r>
-                        <a:rPr sz="1500" b="0">
-                          <a:solidFill>
-                            <a:srgbClr val="1F3B63"/>
-                          </a:solidFill>
-                          <a:latin typeface="Microsoft YaHei"/>
-                          <a:ea typeface="Microsoft YaHei"/>
-                        </a:rPr>
-                        <a:t>0.581</a:t>
-                      </a:r>
-                    </a:p>
-                  </a:txBody>
-                  <a:tcPr/>
-                </a:tc>
-              </a:tr>
-              <a:tr h="426720">
-                <a:tc>
-                  <a:txBody>
-                    <a:bodyPr/>
-                    <a:lstStyle/>
-                    <a:p>
-                      <a:pPr algn="ctr"/>
-                      <a:r>
-                        <a:rPr sz="1500" b="0">
-                          <a:solidFill>
-                            <a:srgbClr val="1F3B63"/>
-                          </a:solidFill>
-                          <a:latin typeface="Microsoft YaHei"/>
-                          <a:ea typeface="Microsoft YaHei"/>
-                        </a:rPr>
-                        <a:t>C3I（阴影指数）</a:t>
-                      </a:r>
-                    </a:p>
-                  </a:txBody>
-                  <a:tcPr/>
-                </a:tc>
-                <a:tc>
-                  <a:txBody>
-                    <a:bodyPr/>
-                    <a:lstStyle/>
-                    <a:p>
-                      <a:pPr algn="ctr"/>
-                      <a:r>
-                        <a:rPr sz="1500" b="0">
-                          <a:solidFill>
-                            <a:srgbClr val="1F3B63"/>
-                          </a:solidFill>
-                          <a:latin typeface="Microsoft YaHei"/>
-                          <a:ea typeface="Microsoft YaHei"/>
-                        </a:rPr>
-                        <a:t>0.162</a:t>
-                      </a:r>
-                    </a:p>
-                  </a:txBody>
-                  <a:tcPr/>
-                </a:tc>
-                <a:tc>
-                  <a:txBody>
-                    <a:bodyPr/>
-                    <a:lstStyle/>
-                    <a:p>
-                      <a:pPr algn="ctr"/>
-                      <a:r>
-                        <a:rPr sz="1500" b="0">
-                          <a:solidFill>
-                            <a:srgbClr val="1F3B63"/>
-                          </a:solidFill>
-                          <a:latin typeface="Microsoft YaHei"/>
-                          <a:ea typeface="Microsoft YaHei"/>
-                        </a:rPr>
-                        <a:t>0.606</a:t>
-                      </a:r>
-                    </a:p>
-                  </a:txBody>
-                  <a:tcPr/>
-                </a:tc>
-                <a:tc>
-                  <a:txBody>
-                    <a:bodyPr/>
-                    <a:lstStyle/>
-                    <a:p>
-                      <a:pPr algn="ctr"/>
-                      <a:r>
-                        <a:rPr sz="1500" b="0">
-                          <a:solidFill>
-                            <a:srgbClr val="1F3B63"/>
-                          </a:solidFill>
-                          <a:latin typeface="Microsoft YaHei"/>
-                          <a:ea typeface="Microsoft YaHei"/>
-                        </a:rPr>
-                        <a:t>0.211</a:t>
-                      </a:r>
-                    </a:p>
-                  </a:txBody>
-                  <a:tcPr/>
-                </a:tc>
-              </a:tr>
-              <a:tr h="426720">
-                <a:tc>
-                  <a:txBody>
-                    <a:bodyPr/>
-                    <a:lstStyle/>
-                    <a:p>
-                      <a:pPr algn="ctr"/>
-                      <a:r>
-                        <a:rPr sz="1500" b="0">
-                          <a:solidFill>
-                            <a:srgbClr val="1F3B63"/>
-                          </a:solidFill>
-                          <a:latin typeface="Microsoft YaHei"/>
-                          <a:ea typeface="Microsoft YaHei"/>
-                        </a:rPr>
-                        <a:t>SAM-AMG（零样本）</a:t>
-                      </a:r>
-                    </a:p>
-                  </a:txBody>
-                  <a:tcPr/>
-                </a:tc>
-                <a:tc>
-                  <a:txBody>
-                    <a:bodyPr/>
-                    <a:lstStyle/>
-                    <a:p>
-                      <a:pPr algn="ctr"/>
-                      <a:r>
-                        <a:rPr sz="1500" b="0">
-                          <a:solidFill>
-                            <a:srgbClr val="1F3B63"/>
-                          </a:solidFill>
-                          <a:latin typeface="Microsoft YaHei"/>
-                          <a:ea typeface="Microsoft YaHei"/>
-                        </a:rPr>
-                        <a:t>0.302</a:t>
-                      </a:r>
-                    </a:p>
-                  </a:txBody>
-                  <a:tcPr/>
-                </a:tc>
-                <a:tc>
-                  <a:txBody>
-                    <a:bodyPr/>
-                    <a:lstStyle/>
-                    <a:p>
-                      <a:pPr algn="ctr"/>
-                      <a:r>
-                        <a:rPr sz="1500" b="0">
-                          <a:solidFill>
-                            <a:srgbClr val="1F3B63"/>
-                          </a:solidFill>
-                          <a:latin typeface="Microsoft YaHei"/>
-                          <a:ea typeface="Microsoft YaHei"/>
-                        </a:rPr>
-                        <a:t>0.343</a:t>
-                      </a:r>
-                    </a:p>
-                  </a:txBody>
-                  <a:tcPr/>
-                </a:tc>
-                <a:tc>
-                  <a:txBody>
-                    <a:bodyPr/>
-                    <a:lstStyle/>
-                    <a:p>
-                      <a:pPr algn="ctr"/>
-                      <a:r>
-                        <a:rPr sz="1500" b="0">
-                          <a:solidFill>
-                            <a:srgbClr val="1F3B63"/>
-                          </a:solidFill>
-                          <a:latin typeface="Microsoft YaHei"/>
-                          <a:ea typeface="Microsoft YaHei"/>
-                        </a:rPr>
-                        <a:t>0.442</a:t>
-                      </a:r>
-                    </a:p>
-                  </a:txBody>
-                  <a:tcPr/>
-                </a:tc>
-              </a:tr>
-              <a:tr h="426720">
-                <a:tc>
-                  <a:txBody>
-                    <a:bodyPr/>
-                    <a:lstStyle/>
-                    <a:p>
-                      <a:pPr algn="ctr"/>
-                      <a:r>
-                        <a:rPr sz="1500" b="0">
-                          <a:solidFill>
-                            <a:srgbClr val="1F3B63"/>
-                          </a:solidFill>
-                          <a:latin typeface="Microsoft YaHei"/>
-                          <a:ea typeface="Microsoft YaHei"/>
-                        </a:rPr>
-                        <a:t>增强预处理</a:t>
-                      </a:r>
-                    </a:p>
-                  </a:txBody>
-                  <a:tcPr/>
-                </a:tc>
-                <a:tc>
-                  <a:txBody>
-                    <a:bodyPr/>
-                    <a:lstStyle/>
-                    <a:p>
-                      <a:pPr algn="ctr"/>
-                      <a:r>
-                        <a:rPr sz="1500" b="0">
-                          <a:solidFill>
-                            <a:srgbClr val="1F3B63"/>
-                          </a:solidFill>
-                          <a:latin typeface="Microsoft YaHei"/>
-                          <a:ea typeface="Microsoft YaHei"/>
-                        </a:rPr>
-                        <a:t>0.512</a:t>
-                      </a:r>
-                    </a:p>
-                  </a:txBody>
-                  <a:tcPr/>
-                </a:tc>
-                <a:tc>
-                  <a:txBody>
-                    <a:bodyPr/>
-                    <a:lstStyle/>
-                    <a:p>
-                      <a:pPr algn="ctr"/>
-                      <a:r>
-                        <a:rPr sz="1500" b="0">
-                          <a:solidFill>
-                            <a:srgbClr val="1F3B63"/>
-                          </a:solidFill>
-                          <a:latin typeface="Microsoft YaHei"/>
-                          <a:ea typeface="Microsoft YaHei"/>
-                        </a:rPr>
-                        <a:t>0.149</a:t>
-                      </a:r>
-                    </a:p>
-                  </a:txBody>
-                  <a:tcPr/>
-                </a:tc>
-                <a:tc>
-                  <a:txBody>
-                    <a:bodyPr/>
-                    <a:lstStyle/>
-                    <a:p>
-                      <a:pPr algn="ctr"/>
-                      <a:r>
-                        <a:rPr sz="1500" b="0">
-                          <a:solidFill>
-                            <a:srgbClr val="1F3B63"/>
-                          </a:solidFill>
-                          <a:latin typeface="Microsoft YaHei"/>
-                          <a:ea typeface="Microsoft YaHei"/>
-                        </a:rPr>
-                        <a:t>0.662</a:t>
-                      </a:r>
-                    </a:p>
-                  </a:txBody>
-                  <a:tcPr/>
-                </a:tc>
-              </a:tr>
-              <a:tr h="426720">
-                <a:tc>
-                  <a:txBody>
-                    <a:bodyPr/>
-                    <a:lstStyle/>
-                    <a:p>
-                      <a:pPr algn="ctr"/>
-                      <a:r>
-                        <a:rPr sz="1500" b="0">
-                          <a:solidFill>
-                            <a:srgbClr val="1F3B63"/>
-                          </a:solidFill>
-                          <a:latin typeface="Microsoft YaHei"/>
-                          <a:ea typeface="Microsoft YaHei"/>
-                        </a:rPr>
-                        <a:t>冻结编码器微调 SAM</a:t>
-                      </a:r>
-                    </a:p>
-                  </a:txBody>
-                  <a:tcPr/>
-                </a:tc>
-                <a:tc>
-                  <a:txBody>
-                    <a:bodyPr/>
-                    <a:lstStyle/>
-                    <a:p>
-                      <a:pPr algn="ctr"/>
-                      <a:r>
-                        <a:rPr sz="1500" b="0">
-                          <a:solidFill>
-                            <a:srgbClr val="1F3B63"/>
-                          </a:solidFill>
-                          <a:latin typeface="Microsoft YaHei"/>
-                          <a:ea typeface="Microsoft YaHei"/>
-                        </a:rPr>
-                        <a:t>0.717</a:t>
-                      </a:r>
-                    </a:p>
-                  </a:txBody>
-                  <a:tcPr/>
-                </a:tc>
-                <a:tc>
-                  <a:txBody>
-                    <a:bodyPr/>
-                    <a:lstStyle/>
-                    <a:p>
-                      <a:pPr algn="ctr"/>
-                      <a:r>
-                        <a:rPr sz="1500" b="0">
-                          <a:solidFill>
-                            <a:srgbClr val="1F3B63"/>
-                          </a:solidFill>
-                          <a:latin typeface="Microsoft YaHei"/>
-                          <a:ea typeface="Microsoft YaHei"/>
-                        </a:rPr>
-                        <a:t>0.109</a:t>
-                      </a:r>
-                    </a:p>
-                  </a:txBody>
-                  <a:tcPr/>
-                </a:tc>
-                <a:tc>
-                  <a:txBody>
-                    <a:bodyPr/>
-                    <a:lstStyle/>
-                    <a:p>
-                      <a:pPr algn="ctr"/>
-                      <a:r>
-                        <a:rPr sz="1500" b="0">
-                          <a:solidFill>
-                            <a:srgbClr val="1F3B63"/>
-                          </a:solidFill>
-                          <a:latin typeface="Microsoft YaHei"/>
-                          <a:ea typeface="Microsoft YaHei"/>
-                        </a:rPr>
-                        <a:t>0.833</a:t>
-                      </a:r>
-                    </a:p>
-                  </a:txBody>
-                  <a:tcPr/>
-                </a:tc>
-              </a:tr>
-              <a:tr h="426720">
-                <a:tc>
-                  <a:txBody>
-                    <a:bodyPr/>
-                    <a:lstStyle/>
-                    <a:p>
-                      <a:pPr algn="ctr"/>
-                      <a:r>
-                        <a:rPr sz="1500" b="0">
-                          <a:solidFill>
-                            <a:srgbClr val="1F3B63"/>
-                          </a:solidFill>
-                          <a:latin typeface="Microsoft YaHei"/>
-                          <a:ea typeface="Microsoft YaHei"/>
-                        </a:rPr>
-                        <a:t>全监督 SegNet</a:t>
-                      </a:r>
-                    </a:p>
-                  </a:txBody>
-                  <a:tcPr/>
-                </a:tc>
-                <a:tc>
-                  <a:txBody>
-                    <a:bodyPr/>
-                    <a:lstStyle/>
-                    <a:p>
-                      <a:pPr algn="ctr"/>
-                      <a:r>
-                        <a:rPr sz="1500" b="0">
-                          <a:solidFill>
-                            <a:srgbClr val="1F3B63"/>
-                          </a:solidFill>
-                          <a:latin typeface="Microsoft YaHei"/>
-                          <a:ea typeface="Microsoft YaHei"/>
-                        </a:rPr>
-                        <a:t>0.780</a:t>
-                      </a:r>
-                    </a:p>
-                  </a:txBody>
-                  <a:tcPr/>
-                </a:tc>
-                <a:tc>
-                  <a:txBody>
-                    <a:bodyPr/>
-                    <a:lstStyle/>
-                    <a:p>
-                      <a:pPr algn="ctr"/>
-                      <a:r>
-                        <a:rPr sz="1500" b="0">
-                          <a:solidFill>
-                            <a:srgbClr val="1F3B63"/>
-                          </a:solidFill>
-                          <a:latin typeface="Microsoft YaHei"/>
-                          <a:ea typeface="Microsoft YaHei"/>
-                        </a:rPr>
-                        <a:t>0.086</a:t>
-                      </a:r>
-                    </a:p>
-                  </a:txBody>
-                  <a:tcPr/>
-                </a:tc>
-                <a:tc>
-                  <a:txBody>
-                    <a:bodyPr/>
-                    <a:lstStyle/>
-                    <a:p>
-                      <a:pPr algn="ctr"/>
-                      <a:r>
-                        <a:rPr sz="1500" b="0">
-                          <a:solidFill>
-                            <a:srgbClr val="1F3B63"/>
-                          </a:solidFill>
-                          <a:latin typeface="Microsoft YaHei"/>
-                          <a:ea typeface="Microsoft YaHei"/>
-                        </a:rPr>
-                        <a:t>0.875</a:t>
-                      </a:r>
-                    </a:p>
-                  </a:txBody>
-                  <a:tcPr/>
-                </a:tc>
-              </a:tr>
-              <a:tr h="426720">
-                <a:tc>
-                  <a:txBody>
-                    <a:bodyPr/>
-                    <a:lstStyle/>
-                    <a:p>
-                      <a:pPr algn="ctr"/>
-                      <a:r>
-                        <a:rPr sz="1500" b="0">
-                          <a:solidFill>
-                            <a:srgbClr val="1F3B63"/>
-                          </a:solidFill>
-                          <a:latin typeface="Microsoft YaHei"/>
-                          <a:ea typeface="Microsoft YaHei"/>
-                        </a:rPr>
-                        <a:t>全监督 U-Net</a:t>
-                      </a:r>
-                    </a:p>
-                  </a:txBody>
-                  <a:tcPr/>
-                </a:tc>
-                <a:tc>
-                  <a:txBody>
-                    <a:bodyPr/>
-                    <a:lstStyle/>
-                    <a:p>
-                      <a:pPr algn="ctr"/>
-                      <a:r>
-                        <a:rPr sz="1500" b="0">
-                          <a:solidFill>
-                            <a:srgbClr val="1F3B63"/>
-                          </a:solidFill>
-                          <a:latin typeface="Microsoft YaHei"/>
-                          <a:ea typeface="Microsoft YaHei"/>
-                        </a:rPr>
-                        <a:t>0.805</a:t>
-                      </a:r>
-                    </a:p>
-                  </a:txBody>
-                  <a:tcPr/>
-                </a:tc>
-                <a:tc>
-                  <a:txBody>
-                    <a:bodyPr/>
-                    <a:lstStyle/>
-                    <a:p>
-                      <a:pPr algn="ctr"/>
-                      <a:r>
-                        <a:rPr sz="1500" b="0">
-                          <a:solidFill>
-                            <a:srgbClr val="1F3B63"/>
-                          </a:solidFill>
-                          <a:latin typeface="Microsoft YaHei"/>
-                          <a:ea typeface="Microsoft YaHei"/>
-                        </a:rPr>
-                        <a:t>0.066</a:t>
-                      </a:r>
-                    </a:p>
-                  </a:txBody>
-                  <a:tcPr/>
-                </a:tc>
-                <a:tc>
-                  <a:txBody>
-                    <a:bodyPr/>
-                    <a:lstStyle/>
-                    <a:p>
-                      <a:pPr algn="ctr"/>
-                      <a:r>
-                        <a:rPr sz="1500" b="0">
-                          <a:solidFill>
-                            <a:srgbClr val="1F3B63"/>
-                          </a:solidFill>
-                          <a:latin typeface="Microsoft YaHei"/>
-                          <a:ea typeface="Microsoft YaHei"/>
-                        </a:rPr>
-                        <a:t>0.891</a:t>
-                      </a:r>
-                    </a:p>
-                  </a:txBody>
-                  <a:tcPr/>
-                </a:tc>
-              </a:tr>
-              <a:tr h="426720">
-                <a:tc>
-                  <a:txBody>
-                    <a:bodyPr/>
-                    <a:lstStyle/>
-                    <a:p>
-                      <a:pPr algn="ctr"/>
-                      <a:r>
-                        <a:rPr sz="1500" b="1">
+                        <a:rPr sz="1600" b="1">
                           <a:solidFill>
                             <a:srgbClr val="2E74B5"/>
                           </a:solidFill>
@@ -5230,14 +4668,14 @@
                     <a:p>
                       <a:pPr algn="ctr"/>
                       <a:r>
-                        <a:rPr sz="1500" b="1">
+                        <a:rPr sz="1600" b="1">
                           <a:solidFill>
                             <a:srgbClr val="2E74B5"/>
                           </a:solidFill>
                           <a:latin typeface="Microsoft YaHei"/>
                           <a:ea typeface="Microsoft YaHei"/>
                         </a:rPr>
-                        <a:t>0.839</a:t>
+                        <a:t>0.788</a:t>
                       </a:r>
                     </a:p>
                   </a:txBody>
@@ -5254,14 +4692,14 @@
                     <a:p>
                       <a:pPr algn="ctr"/>
                       <a:r>
-                        <a:rPr sz="1500" b="1">
+                        <a:rPr sz="1600" b="1">
                           <a:solidFill>
                             <a:srgbClr val="2E74B5"/>
                           </a:solidFill>
                           <a:latin typeface="Microsoft YaHei"/>
                           <a:ea typeface="Microsoft YaHei"/>
                         </a:rPr>
-                        <a:t>0.050</a:t>
+                        <a:t>0.064</a:t>
                       </a:r>
                     </a:p>
                   </a:txBody>
@@ -5278,14 +4716,14 @@
                     <a:p>
                       <a:pPr algn="ctr"/>
                       <a:r>
-                        <a:rPr sz="1500" b="1">
+                        <a:rPr sz="1600" b="1">
                           <a:solidFill>
                             <a:srgbClr val="2E74B5"/>
                           </a:solidFill>
                           <a:latin typeface="Microsoft YaHei"/>
                           <a:ea typeface="Microsoft YaHei"/>
                         </a:rPr>
-                        <a:t>0.912</a:t>
+                        <a:t>0.880</a:t>
                       </a:r>
                     </a:p>
                   </a:txBody>
@@ -5296,10 +4734,265 @@
                   </a:tcPr>
                 </a:tc>
               </a:tr>
+              <a:tr h="457200">
+                <a:tc>
+                  <a:txBody>
+                    <a:bodyPr/>
+                    <a:lstStyle/>
+                    <a:p>
+                      <a:pPr algn="ctr"/>
+                      <a:r>
+                        <a:rPr sz="1600" b="0">
+                          <a:solidFill>
+                            <a:srgbClr val="1F3B63"/>
+                          </a:solidFill>
+                          <a:latin typeface="Microsoft YaHei"/>
+                          <a:ea typeface="Microsoft YaHei"/>
+                        </a:rPr>
+                        <a:t>全监督 U-Net †</a:t>
+                      </a:r>
+                    </a:p>
+                  </a:txBody>
+                  <a:tcPr/>
+                </a:tc>
+                <a:tc>
+                  <a:txBody>
+                    <a:bodyPr/>
+                    <a:lstStyle/>
+                    <a:p>
+                      <a:pPr algn="ctr"/>
+                      <a:r>
+                        <a:rPr sz="1600" b="0">
+                          <a:solidFill>
+                            <a:srgbClr val="1F3B63"/>
+                          </a:solidFill>
+                          <a:latin typeface="Microsoft YaHei"/>
+                          <a:ea typeface="Microsoft YaHei"/>
+                        </a:rPr>
+                        <a:t>0.741</a:t>
+                      </a:r>
+                    </a:p>
+                  </a:txBody>
+                  <a:tcPr/>
+                </a:tc>
+                <a:tc>
+                  <a:txBody>
+                    <a:bodyPr/>
+                    <a:lstStyle/>
+                    <a:p>
+                      <a:pPr algn="ctr"/>
+                      <a:r>
+                        <a:rPr sz="1600" b="0">
+                          <a:solidFill>
+                            <a:srgbClr val="1F3B63"/>
+                          </a:solidFill>
+                          <a:latin typeface="Microsoft YaHei"/>
+                          <a:ea typeface="Microsoft YaHei"/>
+                        </a:rPr>
+                        <a:t>0.087</a:t>
+                      </a:r>
+                    </a:p>
+                  </a:txBody>
+                  <a:tcPr/>
+                </a:tc>
+                <a:tc>
+                  <a:txBody>
+                    <a:bodyPr/>
+                    <a:lstStyle/>
+                    <a:p>
+                      <a:pPr algn="ctr"/>
+                      <a:r>
+                        <a:rPr sz="1600" b="0">
+                          <a:solidFill>
+                            <a:srgbClr val="1F3B63"/>
+                          </a:solidFill>
+                          <a:latin typeface="Microsoft YaHei"/>
+                          <a:ea typeface="Microsoft YaHei"/>
+                        </a:rPr>
+                        <a:t>0.846</a:t>
+                      </a:r>
+                    </a:p>
+                  </a:txBody>
+                  <a:tcPr/>
+                </a:tc>
+              </a:tr>
+              <a:tr h="457200">
+                <a:tc>
+                  <a:txBody>
+                    <a:bodyPr/>
+                    <a:lstStyle/>
+                    <a:p>
+                      <a:pPr algn="ctr"/>
+                      <a:r>
+                        <a:rPr sz="1600" b="0">
+                          <a:solidFill>
+                            <a:srgbClr val="1F3B63"/>
+                          </a:solidFill>
+                          <a:latin typeface="Microsoft YaHei"/>
+                          <a:ea typeface="Microsoft YaHei"/>
+                        </a:rPr>
+                        <a:t>全监督 SegNet</a:t>
+                      </a:r>
+                    </a:p>
+                  </a:txBody>
+                  <a:tcPr/>
+                </a:tc>
+                <a:tc>
+                  <a:txBody>
+                    <a:bodyPr/>
+                    <a:lstStyle/>
+                    <a:p>
+                      <a:pPr algn="ctr"/>
+                      <a:r>
+                        <a:rPr sz="1600" b="0">
+                          <a:solidFill>
+                            <a:srgbClr val="1F3B63"/>
+                          </a:solidFill>
+                          <a:latin typeface="Microsoft YaHei"/>
+                          <a:ea typeface="Microsoft YaHei"/>
+                        </a:rPr>
+                        <a:t>0.740</a:t>
+                      </a:r>
+                    </a:p>
+                  </a:txBody>
+                  <a:tcPr/>
+                </a:tc>
+                <a:tc>
+                  <a:txBody>
+                    <a:bodyPr/>
+                    <a:lstStyle/>
+                    <a:p>
+                      <a:pPr algn="ctr"/>
+                      <a:r>
+                        <a:rPr sz="1600" b="0">
+                          <a:solidFill>
+                            <a:srgbClr val="1F3B63"/>
+                          </a:solidFill>
+                          <a:latin typeface="Microsoft YaHei"/>
+                          <a:ea typeface="Microsoft YaHei"/>
+                        </a:rPr>
+                        <a:t>0.102</a:t>
+                      </a:r>
+                    </a:p>
+                  </a:txBody>
+                  <a:tcPr/>
+                </a:tc>
+                <a:tc>
+                  <a:txBody>
+                    <a:bodyPr/>
+                    <a:lstStyle/>
+                    <a:p>
+                      <a:pPr algn="ctr"/>
+                      <a:r>
+                        <a:rPr sz="1600" b="0">
+                          <a:solidFill>
+                            <a:srgbClr val="1F3B63"/>
+                          </a:solidFill>
+                          <a:latin typeface="Microsoft YaHei"/>
+                          <a:ea typeface="Microsoft YaHei"/>
+                        </a:rPr>
+                        <a:t>0.847</a:t>
+                      </a:r>
+                    </a:p>
+                  </a:txBody>
+                  <a:tcPr/>
+                </a:tc>
+              </a:tr>
             </a:tbl>
           </a:graphicData>
         </a:graphic>
       </p:graphicFrame>
+      <p:sp>
+        <p:nvSpPr>
+          <p:cNvPr id="4" name="TextBox 3"/>
+          <p:cNvSpPr txBox="1"/>
+          <p:nvPr/>
+        </p:nvSpPr>
+        <p:spPr>
+          <a:xfrm>
+            <a:off x="914400" y="4023360"/>
+            <a:ext cx="10332720" cy="2194560"/>
+          </a:xfrm>
+          <a:prstGeom prst="rect">
+            <a:avLst/>
+          </a:prstGeom>
+          <a:noFill/>
+        </p:spPr>
+        <p:txBody>
+          <a:bodyPr wrap="square">
+            <a:spAutoFit/>
+          </a:bodyPr>
+          <a:lstStyle/>
+          <a:p>
+            <a:pPr>
+              <a:spcAft>
+                <a:spcPts val="800"/>
+              </a:spcAft>
+            </a:pPr>
+            <a:r>
+              <a:rPr sz="1300" b="0">
+                <a:solidFill>
+                  <a:srgbClr val="1F3B63"/>
+                </a:solidFill>
+                <a:latin typeface="Microsoft YaHei"/>
+                <a:ea typeface="Microsoft YaHei"/>
+              </a:rPr>
+              <a:t>† U-Net 为训练 58/60 轮中断后、第 50 轮 best-val 检查点（val IoU 0.7831）</a:t>
+            </a:r>
+          </a:p>
+          <a:p>
+            <a:pPr>
+              <a:spcAft>
+                <a:spcPts val="800"/>
+              </a:spcAft>
+            </a:pPr>
+            <a:r>
+              <a:rPr sz="1300" b="0">
+                <a:solidFill>
+                  <a:srgbClr val="1F3B63"/>
+                </a:solidFill>
+                <a:latin typeface="Microsoft YaHei"/>
+                <a:ea typeface="Microsoft YaHei"/>
+              </a:rPr>
+              <a:t>统计限定：单 seed、未做显著性检验，测试集仅 21 个独立场景，领先幅度小于逐图标准差</a:t>
+            </a:r>
+          </a:p>
+          <a:p>
+            <a:pPr>
+              <a:spcAft>
+                <a:spcPts val="800"/>
+              </a:spcAft>
+            </a:pPr>
+            <a:r>
+              <a:rPr sz="1300" b="0">
+                <a:solidFill>
+                  <a:srgbClr val="1F3B63"/>
+                </a:solidFill>
+                <a:latin typeface="Microsoft YaHei"/>
+                <a:ea typeface="Microsoft YaHei"/>
+              </a:rPr>
+              <a:t>→ 仅表述为“数值上高于”全监督基线，不宣称“显著超越”</a:t>
+            </a:r>
+          </a:p>
+          <a:p>
+            <a:pPr>
+              <a:spcAft>
+                <a:spcPts val="800"/>
+              </a:spcAft>
+            </a:pPr>
+            <a:r>
+              <a:rPr sz="1300" b="0">
+                <a:solidFill>
+                  <a:srgbClr val="1F3B63"/>
+                </a:solidFill>
+                <a:latin typeface="Microsoft YaHei"/>
+                <a:ea typeface="Microsoft YaHei"/>
+              </a:rPr>
+              <a:t>官方（含泄漏）口径：LoRA 0.839 / U-Net 0.805‡ / SegNet 0.780‡（‡ 旧 run：泄漏+增强 bug），因系统性偏高，不作为干净泛化结论</a:t>
+            </a:r>
+          </a:p>
+        </p:txBody>
+      </p:sp>
     </p:spTree>
   </p:cSld>
   <p:clrMapOvr>
@@ -5348,7 +5041,7 @@
                 <a:latin typeface="Microsoft YaHei"/>
                 <a:ea typeface="Microsoft YaHei"/>
               </a:rPr>
-              <a:t>指标对比柱状图</a:t>
+              <a:t>指标对比柱状图（无泄漏划分）</a:t>
             </a:r>
           </a:p>
         </p:txBody>
@@ -5370,7 +5063,7 @@
         <p:spPr>
           <a:xfrm>
             <a:off x="1371600" y="1280160"/>
-            <a:ext cx="9418320" cy="4889511"/>
+            <a:ext cx="9418320" cy="3561246"/>
           </a:xfrm>
           <a:prstGeom prst="rect">
             <a:avLst/>
